--- a/docs/VIntelligence_Army_Cyber_Brief.pptx
+++ b/docs/VIntelligence_Army_Cyber_Brief.pptx
@@ -4523,7 +4523,7 @@
                             <a:srgbClr val="1E8A49"/>
                           </a:solidFill>
                         </a:rPr>
-                        <a:t>8.1%</a:t>
+                        <a:t>10.6%</a:t>
                       </a:r>
                     </a:p>
                   </a:txBody>
@@ -4701,7 +4701,7 @@
                   <a:srgbClr val="2D3748"/>
                 </a:solidFill>
               </a:rPr>
-              <a:t>embedding composite also caught all four — including BOTH Volt and Salt Typhoon — at 8.1% FP, though it cleanly separates only two of the four (USR-118, USR-156); AUC ≈ 0.98.</a:t>
+              <a:t>embedding composite also caught all four — including BOTH Volt and Salt Typhoon — at 10.6% FP, though it cleanly separates only two of the four (USR-118, USR-156); AUC ≈ 0.98.</a:t>
             </a:r>
           </a:p>
           <a:p>
